--- a/elp/ELP_2회차_프롬프트_실습_강의안.pptx
+++ b/elp/ELP_2회차_프롬프트_실습_강의안.pptx
@@ -3127,7 +3127,7 @@
       <p:grpSpPr/>
       <p:sp>
         <p:nvSpPr>
-          <p:cNvPr id="2" name="Oval 1"/>
+          <p:cNvPr id="2" name="deckgen:decor"/>
           <p:cNvSpPr/>
           <p:nvPr/>
         </p:nvSpPr>
@@ -3157,7 +3157,7 @@
       </p:sp>
       <p:sp>
         <p:nvSpPr>
-          <p:cNvPr id="3" name="Oval 2"/>
+          <p:cNvPr id="3" name="deckgen:decor"/>
           <p:cNvSpPr/>
           <p:nvPr/>
         </p:nvSpPr>
@@ -3187,7 +3187,7 @@
       </p:sp>
       <p:sp>
         <p:nvSpPr>
-          <p:cNvPr id="4" name="Oval 3"/>
+          <p:cNvPr id="4" name="deckgen:decor"/>
           <p:cNvSpPr/>
           <p:nvPr/>
         </p:nvSpPr>
@@ -3217,7 +3217,7 @@
       </p:sp>
       <p:sp>
         <p:nvSpPr>
-          <p:cNvPr id="5" name="Rectangle 4"/>
+          <p:cNvPr id="5" name="deckgen:decor"/>
           <p:cNvSpPr/>
           <p:nvPr/>
         </p:nvSpPr>
@@ -3247,7 +3247,7 @@
       </p:sp>
       <p:sp>
         <p:nvSpPr>
-          <p:cNvPr id="6" name="Oval 5"/>
+          <p:cNvPr id="6" name="deckgen:decor"/>
           <p:cNvSpPr/>
           <p:nvPr/>
         </p:nvSpPr>
@@ -3277,7 +3277,7 @@
       </p:sp>
       <p:sp>
         <p:nvSpPr>
-          <p:cNvPr id="7" name="Oval 6"/>
+          <p:cNvPr id="7" name="deckgen:decor"/>
           <p:cNvSpPr/>
           <p:nvPr/>
         </p:nvSpPr>
@@ -3307,7 +3307,7 @@
       </p:sp>
       <p:sp>
         <p:nvSpPr>
-          <p:cNvPr id="8" name="Oval 7"/>
+          <p:cNvPr id="8" name="deckgen:decor"/>
           <p:cNvSpPr/>
           <p:nvPr/>
         </p:nvSpPr>
@@ -3337,7 +3337,7 @@
       </p:sp>
       <p:sp>
         <p:nvSpPr>
-          <p:cNvPr id="9" name="Oval 8"/>
+          <p:cNvPr id="9" name="deckgen:decor"/>
           <p:cNvSpPr/>
           <p:nvPr/>
         </p:nvSpPr>
@@ -3367,7 +3367,7 @@
       </p:sp>
       <p:sp>
         <p:nvSpPr>
-          <p:cNvPr id="10" name="Rectangle 9"/>
+          <p:cNvPr id="10" name="deckgen:decor"/>
           <p:cNvSpPr/>
           <p:nvPr/>
         </p:nvSpPr>
@@ -3645,7 +3645,7 @@
       <p:grpSpPr/>
       <p:sp>
         <p:nvSpPr>
-          <p:cNvPr id="2" name="Oval 1"/>
+          <p:cNvPr id="2" name="deckgen:decor"/>
           <p:cNvSpPr/>
           <p:nvPr/>
         </p:nvSpPr>
@@ -3675,7 +3675,7 @@
       </p:sp>
       <p:sp>
         <p:nvSpPr>
-          <p:cNvPr id="3" name="Oval 2"/>
+          <p:cNvPr id="3" name="deckgen:decor"/>
           <p:cNvSpPr/>
           <p:nvPr/>
         </p:nvSpPr>
@@ -3705,7 +3705,7 @@
       </p:sp>
       <p:sp>
         <p:nvSpPr>
-          <p:cNvPr id="4" name="Oval 3"/>
+          <p:cNvPr id="4" name="deckgen:decor"/>
           <p:cNvSpPr/>
           <p:nvPr/>
         </p:nvSpPr>
@@ -5169,7 +5169,7 @@
       <p:grpSpPr/>
       <p:sp>
         <p:nvSpPr>
-          <p:cNvPr id="2" name="Oval 1"/>
+          <p:cNvPr id="2" name="deckgen:decor"/>
           <p:cNvSpPr/>
           <p:nvPr/>
         </p:nvSpPr>
@@ -5199,7 +5199,7 @@
       </p:sp>
       <p:sp>
         <p:nvSpPr>
-          <p:cNvPr id="3" name="Oval 2"/>
+          <p:cNvPr id="3" name="deckgen:decor"/>
           <p:cNvSpPr/>
           <p:nvPr/>
         </p:nvSpPr>
@@ -5229,7 +5229,7 @@
       </p:sp>
       <p:sp>
         <p:nvSpPr>
-          <p:cNvPr id="4" name="Oval 3"/>
+          <p:cNvPr id="4" name="deckgen:decor"/>
           <p:cNvSpPr/>
           <p:nvPr/>
         </p:nvSpPr>
@@ -6014,7 +6014,7 @@
       <p:grpSpPr/>
       <p:sp>
         <p:nvSpPr>
-          <p:cNvPr id="2" name="Oval 1"/>
+          <p:cNvPr id="2" name="deckgen:decor"/>
           <p:cNvSpPr/>
           <p:nvPr/>
         </p:nvSpPr>
@@ -6044,7 +6044,7 @@
       </p:sp>
       <p:sp>
         <p:nvSpPr>
-          <p:cNvPr id="3" name="Oval 2"/>
+          <p:cNvPr id="3" name="deckgen:decor"/>
           <p:cNvSpPr/>
           <p:nvPr/>
         </p:nvSpPr>
@@ -6357,7 +6357,7 @@
       <p:grpSpPr/>
       <p:sp>
         <p:nvSpPr>
-          <p:cNvPr id="2" name="Oval 1"/>
+          <p:cNvPr id="2" name="deckgen:decor"/>
           <p:cNvSpPr/>
           <p:nvPr/>
         </p:nvSpPr>
@@ -6387,7 +6387,7 @@
       </p:sp>
       <p:sp>
         <p:nvSpPr>
-          <p:cNvPr id="3" name="Oval 2"/>
+          <p:cNvPr id="3" name="deckgen:decor"/>
           <p:cNvSpPr/>
           <p:nvPr/>
         </p:nvSpPr>
@@ -6417,7 +6417,7 @@
       </p:sp>
       <p:sp>
         <p:nvSpPr>
-          <p:cNvPr id="4" name="Oval 3"/>
+          <p:cNvPr id="4" name="deckgen:decor"/>
           <p:cNvSpPr/>
           <p:nvPr/>
         </p:nvSpPr>
@@ -6767,7 +6767,7 @@
       </p:sp>
       <p:sp>
         <p:nvSpPr>
-          <p:cNvPr id="14" name="TextBox 13"/>
+          <p:cNvPr id="14" name="deckgen:ornament"/>
           <p:cNvSpPr txBox="1"/>
           <p:nvPr/>
         </p:nvSpPr>
@@ -7091,7 +7091,7 @@
       <p:grpSpPr/>
       <p:sp>
         <p:nvSpPr>
-          <p:cNvPr id="2" name="Oval 1"/>
+          <p:cNvPr id="2" name="deckgen:decor"/>
           <p:cNvSpPr/>
           <p:nvPr/>
         </p:nvSpPr>
@@ -7121,7 +7121,7 @@
       </p:sp>
       <p:sp>
         <p:nvSpPr>
-          <p:cNvPr id="3" name="Oval 2"/>
+          <p:cNvPr id="3" name="deckgen:decor"/>
           <p:cNvSpPr/>
           <p:nvPr/>
         </p:nvSpPr>
@@ -7151,7 +7151,7 @@
       </p:sp>
       <p:sp>
         <p:nvSpPr>
-          <p:cNvPr id="4" name="Oval 3"/>
+          <p:cNvPr id="4" name="deckgen:decor"/>
           <p:cNvSpPr/>
           <p:nvPr/>
         </p:nvSpPr>
@@ -8221,7 +8221,7 @@
       <p:grpSpPr/>
       <p:sp>
         <p:nvSpPr>
-          <p:cNvPr id="2" name="Oval 1"/>
+          <p:cNvPr id="2" name="deckgen:decor"/>
           <p:cNvSpPr/>
           <p:nvPr/>
         </p:nvSpPr>
@@ -8251,7 +8251,7 @@
       </p:sp>
       <p:sp>
         <p:nvSpPr>
-          <p:cNvPr id="3" name="Oval 2"/>
+          <p:cNvPr id="3" name="deckgen:decor"/>
           <p:cNvSpPr/>
           <p:nvPr/>
         </p:nvSpPr>
@@ -8281,7 +8281,7 @@
       </p:sp>
       <p:sp>
         <p:nvSpPr>
-          <p:cNvPr id="4" name="Oval 3"/>
+          <p:cNvPr id="4" name="deckgen:decor"/>
           <p:cNvSpPr/>
           <p:nvPr/>
         </p:nvSpPr>
@@ -8631,7 +8631,7 @@
       </p:sp>
       <p:sp>
         <p:nvSpPr>
-          <p:cNvPr id="14" name="TextBox 13"/>
+          <p:cNvPr id="14" name="deckgen:ornament"/>
           <p:cNvSpPr txBox="1"/>
           <p:nvPr/>
         </p:nvSpPr>
@@ -8955,7 +8955,7 @@
       <p:grpSpPr/>
       <p:sp>
         <p:nvSpPr>
-          <p:cNvPr id="2" name="Oval 1"/>
+          <p:cNvPr id="2" name="deckgen:decor"/>
           <p:cNvSpPr/>
           <p:nvPr/>
         </p:nvSpPr>
@@ -8985,7 +8985,7 @@
       </p:sp>
       <p:sp>
         <p:nvSpPr>
-          <p:cNvPr id="3" name="Oval 2"/>
+          <p:cNvPr id="3" name="deckgen:decor"/>
           <p:cNvSpPr/>
           <p:nvPr/>
         </p:nvSpPr>
@@ -9015,7 +9015,7 @@
       </p:sp>
       <p:sp>
         <p:nvSpPr>
-          <p:cNvPr id="4" name="Oval 3"/>
+          <p:cNvPr id="4" name="deckgen:decor"/>
           <p:cNvSpPr/>
           <p:nvPr/>
         </p:nvSpPr>
@@ -10085,7 +10085,7 @@
       <p:grpSpPr/>
       <p:sp>
         <p:nvSpPr>
-          <p:cNvPr id="2" name="Oval 1"/>
+          <p:cNvPr id="2" name="deckgen:decor"/>
           <p:cNvSpPr/>
           <p:nvPr/>
         </p:nvSpPr>
@@ -10115,7 +10115,7 @@
       </p:sp>
       <p:sp>
         <p:nvSpPr>
-          <p:cNvPr id="3" name="Oval 2"/>
+          <p:cNvPr id="3" name="deckgen:decor"/>
           <p:cNvSpPr/>
           <p:nvPr/>
         </p:nvSpPr>
@@ -10145,7 +10145,7 @@
       </p:sp>
       <p:sp>
         <p:nvSpPr>
-          <p:cNvPr id="4" name="Oval 3"/>
+          <p:cNvPr id="4" name="deckgen:decor"/>
           <p:cNvSpPr/>
           <p:nvPr/>
         </p:nvSpPr>
@@ -10495,7 +10495,7 @@
       </p:sp>
       <p:sp>
         <p:nvSpPr>
-          <p:cNvPr id="14" name="TextBox 13"/>
+          <p:cNvPr id="14" name="deckgen:ornament"/>
           <p:cNvSpPr txBox="1"/>
           <p:nvPr/>
         </p:nvSpPr>
@@ -10819,7 +10819,7 @@
       <p:grpSpPr/>
       <p:sp>
         <p:nvSpPr>
-          <p:cNvPr id="2" name="Oval 1"/>
+          <p:cNvPr id="2" name="deckgen:decor"/>
           <p:cNvSpPr/>
           <p:nvPr/>
         </p:nvSpPr>
@@ -10849,7 +10849,7 @@
       </p:sp>
       <p:sp>
         <p:nvSpPr>
-          <p:cNvPr id="3" name="Oval 2"/>
+          <p:cNvPr id="3" name="deckgen:decor"/>
           <p:cNvSpPr/>
           <p:nvPr/>
         </p:nvSpPr>
@@ -10879,7 +10879,7 @@
       </p:sp>
       <p:sp>
         <p:nvSpPr>
-          <p:cNvPr id="4" name="Oval 3"/>
+          <p:cNvPr id="4" name="deckgen:decor"/>
           <p:cNvSpPr/>
           <p:nvPr/>
         </p:nvSpPr>
@@ -11949,7 +11949,7 @@
       <p:grpSpPr/>
       <p:sp>
         <p:nvSpPr>
-          <p:cNvPr id="2" name="Oval 1"/>
+          <p:cNvPr id="2" name="deckgen:decor"/>
           <p:cNvSpPr/>
           <p:nvPr/>
         </p:nvSpPr>
@@ -11979,7 +11979,7 @@
       </p:sp>
       <p:sp>
         <p:nvSpPr>
-          <p:cNvPr id="3" name="Oval 2"/>
+          <p:cNvPr id="3" name="deckgen:decor"/>
           <p:cNvSpPr/>
           <p:nvPr/>
         </p:nvSpPr>
@@ -12009,7 +12009,7 @@
       </p:sp>
       <p:sp>
         <p:nvSpPr>
-          <p:cNvPr id="4" name="Oval 3"/>
+          <p:cNvPr id="4" name="deckgen:decor"/>
           <p:cNvSpPr/>
           <p:nvPr/>
         </p:nvSpPr>
@@ -12359,7 +12359,7 @@
       </p:sp>
       <p:sp>
         <p:nvSpPr>
-          <p:cNvPr id="14" name="TextBox 13"/>
+          <p:cNvPr id="14" name="deckgen:ornament"/>
           <p:cNvSpPr txBox="1"/>
           <p:nvPr/>
         </p:nvSpPr>
@@ -12683,7 +12683,7 @@
       <p:grpSpPr/>
       <p:sp>
         <p:nvSpPr>
-          <p:cNvPr id="2" name="Oval 1"/>
+          <p:cNvPr id="2" name="deckgen:decor"/>
           <p:cNvSpPr/>
           <p:nvPr/>
         </p:nvSpPr>
@@ -12713,7 +12713,7 @@
       </p:sp>
       <p:sp>
         <p:nvSpPr>
-          <p:cNvPr id="3" name="Oval 2"/>
+          <p:cNvPr id="3" name="deckgen:decor"/>
           <p:cNvSpPr/>
           <p:nvPr/>
         </p:nvSpPr>
@@ -12743,7 +12743,7 @@
       </p:sp>
       <p:sp>
         <p:nvSpPr>
-          <p:cNvPr id="4" name="Oval 3"/>
+          <p:cNvPr id="4" name="deckgen:decor"/>
           <p:cNvSpPr/>
           <p:nvPr/>
         </p:nvSpPr>
@@ -13674,7 +13674,7 @@
       <p:grpSpPr/>
       <p:sp>
         <p:nvSpPr>
-          <p:cNvPr id="2" name="Oval 1"/>
+          <p:cNvPr id="2" name="deckgen:decor"/>
           <p:cNvSpPr/>
           <p:nvPr/>
         </p:nvSpPr>
@@ -13704,7 +13704,7 @@
       </p:sp>
       <p:sp>
         <p:nvSpPr>
-          <p:cNvPr id="3" name="Oval 2"/>
+          <p:cNvPr id="3" name="deckgen:decor"/>
           <p:cNvSpPr/>
           <p:nvPr/>
         </p:nvSpPr>
@@ -13734,7 +13734,7 @@
       </p:sp>
       <p:sp>
         <p:nvSpPr>
-          <p:cNvPr id="4" name="Oval 3"/>
+          <p:cNvPr id="4" name="deckgen:decor"/>
           <p:cNvSpPr/>
           <p:nvPr/>
         </p:nvSpPr>
@@ -14804,7 +14804,7 @@
       <p:grpSpPr/>
       <p:sp>
         <p:nvSpPr>
-          <p:cNvPr id="2" name="Oval 1"/>
+          <p:cNvPr id="2" name="deckgen:decor"/>
           <p:cNvSpPr/>
           <p:nvPr/>
         </p:nvSpPr>
@@ -14834,7 +14834,7 @@
       </p:sp>
       <p:sp>
         <p:nvSpPr>
-          <p:cNvPr id="3" name="Oval 2"/>
+          <p:cNvPr id="3" name="deckgen:decor"/>
           <p:cNvSpPr/>
           <p:nvPr/>
         </p:nvSpPr>
@@ -14864,7 +14864,7 @@
       </p:sp>
       <p:sp>
         <p:nvSpPr>
-          <p:cNvPr id="4" name="Oval 3"/>
+          <p:cNvPr id="4" name="deckgen:decor"/>
           <p:cNvSpPr/>
           <p:nvPr/>
         </p:nvSpPr>
@@ -15214,7 +15214,7 @@
       </p:sp>
       <p:sp>
         <p:nvSpPr>
-          <p:cNvPr id="14" name="TextBox 13"/>
+          <p:cNvPr id="14" name="deckgen:ornament"/>
           <p:cNvSpPr txBox="1"/>
           <p:nvPr/>
         </p:nvSpPr>
@@ -15538,7 +15538,7 @@
       <p:grpSpPr/>
       <p:sp>
         <p:nvSpPr>
-          <p:cNvPr id="2" name="Oval 1"/>
+          <p:cNvPr id="2" name="deckgen:decor"/>
           <p:cNvSpPr/>
           <p:nvPr/>
         </p:nvSpPr>
@@ -15568,7 +15568,7 @@
       </p:sp>
       <p:sp>
         <p:nvSpPr>
-          <p:cNvPr id="3" name="Oval 2"/>
+          <p:cNvPr id="3" name="deckgen:decor"/>
           <p:cNvSpPr/>
           <p:nvPr/>
         </p:nvSpPr>
@@ -15598,7 +15598,7 @@
       </p:sp>
       <p:sp>
         <p:nvSpPr>
-          <p:cNvPr id="4" name="Oval 3"/>
+          <p:cNvPr id="4" name="deckgen:decor"/>
           <p:cNvSpPr/>
           <p:nvPr/>
         </p:nvSpPr>
@@ -16668,7 +16668,7 @@
       <p:grpSpPr/>
       <p:sp>
         <p:nvSpPr>
-          <p:cNvPr id="2" name="Oval 1"/>
+          <p:cNvPr id="2" name="deckgen:decor"/>
           <p:cNvSpPr/>
           <p:nvPr/>
         </p:nvSpPr>
@@ -16698,7 +16698,7 @@
       </p:sp>
       <p:sp>
         <p:nvSpPr>
-          <p:cNvPr id="3" name="Oval 2"/>
+          <p:cNvPr id="3" name="deckgen:decor"/>
           <p:cNvSpPr/>
           <p:nvPr/>
         </p:nvSpPr>
@@ -17011,7 +17011,7 @@
       <p:grpSpPr/>
       <p:sp>
         <p:nvSpPr>
-          <p:cNvPr id="2" name="Oval 1"/>
+          <p:cNvPr id="2" name="deckgen:decor"/>
           <p:cNvSpPr/>
           <p:nvPr/>
         </p:nvSpPr>
@@ -17041,7 +17041,7 @@
       </p:sp>
       <p:sp>
         <p:nvSpPr>
-          <p:cNvPr id="3" name="Oval 2"/>
+          <p:cNvPr id="3" name="deckgen:decor"/>
           <p:cNvSpPr/>
           <p:nvPr/>
         </p:nvSpPr>
@@ -17071,7 +17071,7 @@
       </p:sp>
       <p:sp>
         <p:nvSpPr>
-          <p:cNvPr id="4" name="Oval 3"/>
+          <p:cNvPr id="4" name="deckgen:decor"/>
           <p:cNvSpPr/>
           <p:nvPr/>
         </p:nvSpPr>
@@ -17421,7 +17421,7 @@
       </p:sp>
       <p:sp>
         <p:nvSpPr>
-          <p:cNvPr id="14" name="TextBox 13"/>
+          <p:cNvPr id="14" name="deckgen:ornament"/>
           <p:cNvSpPr txBox="1"/>
           <p:nvPr/>
         </p:nvSpPr>
@@ -17745,7 +17745,7 @@
       <p:grpSpPr/>
       <p:sp>
         <p:nvSpPr>
-          <p:cNvPr id="2" name="Oval 1"/>
+          <p:cNvPr id="2" name="deckgen:decor"/>
           <p:cNvSpPr/>
           <p:nvPr/>
         </p:nvSpPr>
@@ -17775,7 +17775,7 @@
       </p:sp>
       <p:sp>
         <p:nvSpPr>
-          <p:cNvPr id="3" name="Oval 2"/>
+          <p:cNvPr id="3" name="deckgen:decor"/>
           <p:cNvSpPr/>
           <p:nvPr/>
         </p:nvSpPr>
@@ -17805,7 +17805,7 @@
       </p:sp>
       <p:sp>
         <p:nvSpPr>
-          <p:cNvPr id="4" name="Oval 3"/>
+          <p:cNvPr id="4" name="deckgen:decor"/>
           <p:cNvSpPr/>
           <p:nvPr/>
         </p:nvSpPr>
@@ -18875,7 +18875,7 @@
       <p:grpSpPr/>
       <p:sp>
         <p:nvSpPr>
-          <p:cNvPr id="2" name="Oval 1"/>
+          <p:cNvPr id="2" name="deckgen:decor"/>
           <p:cNvSpPr/>
           <p:nvPr/>
         </p:nvSpPr>
@@ -18905,7 +18905,7 @@
       </p:sp>
       <p:sp>
         <p:nvSpPr>
-          <p:cNvPr id="3" name="Oval 2"/>
+          <p:cNvPr id="3" name="deckgen:decor"/>
           <p:cNvSpPr/>
           <p:nvPr/>
         </p:nvSpPr>
@@ -18935,7 +18935,7 @@
       </p:sp>
       <p:sp>
         <p:nvSpPr>
-          <p:cNvPr id="4" name="Oval 3"/>
+          <p:cNvPr id="4" name="deckgen:decor"/>
           <p:cNvSpPr/>
           <p:nvPr/>
         </p:nvSpPr>
@@ -19285,7 +19285,7 @@
       </p:sp>
       <p:sp>
         <p:nvSpPr>
-          <p:cNvPr id="14" name="TextBox 13"/>
+          <p:cNvPr id="14" name="deckgen:ornament"/>
           <p:cNvSpPr txBox="1"/>
           <p:nvPr/>
         </p:nvSpPr>
@@ -19609,7 +19609,7 @@
       <p:grpSpPr/>
       <p:sp>
         <p:nvSpPr>
-          <p:cNvPr id="2" name="Oval 1"/>
+          <p:cNvPr id="2" name="deckgen:decor"/>
           <p:cNvSpPr/>
           <p:nvPr/>
         </p:nvSpPr>
@@ -19639,7 +19639,7 @@
       </p:sp>
       <p:sp>
         <p:nvSpPr>
-          <p:cNvPr id="3" name="Oval 2"/>
+          <p:cNvPr id="3" name="deckgen:decor"/>
           <p:cNvSpPr/>
           <p:nvPr/>
         </p:nvSpPr>
@@ -19669,7 +19669,7 @@
       </p:sp>
       <p:sp>
         <p:nvSpPr>
-          <p:cNvPr id="4" name="Oval 3"/>
+          <p:cNvPr id="4" name="deckgen:decor"/>
           <p:cNvSpPr/>
           <p:nvPr/>
         </p:nvSpPr>
@@ -20739,7 +20739,7 @@
       <p:grpSpPr/>
       <p:sp>
         <p:nvSpPr>
-          <p:cNvPr id="2" name="Oval 1"/>
+          <p:cNvPr id="2" name="deckgen:decor"/>
           <p:cNvSpPr/>
           <p:nvPr/>
         </p:nvSpPr>
@@ -20769,7 +20769,7 @@
       </p:sp>
       <p:sp>
         <p:nvSpPr>
-          <p:cNvPr id="3" name="Oval 2"/>
+          <p:cNvPr id="3" name="deckgen:decor"/>
           <p:cNvSpPr/>
           <p:nvPr/>
         </p:nvSpPr>
@@ -20799,7 +20799,7 @@
       </p:sp>
       <p:sp>
         <p:nvSpPr>
-          <p:cNvPr id="4" name="Oval 3"/>
+          <p:cNvPr id="4" name="deckgen:decor"/>
           <p:cNvSpPr/>
           <p:nvPr/>
         </p:nvSpPr>
@@ -21149,7 +21149,7 @@
       </p:sp>
       <p:sp>
         <p:nvSpPr>
-          <p:cNvPr id="14" name="TextBox 13"/>
+          <p:cNvPr id="14" name="deckgen:ornament"/>
           <p:cNvSpPr txBox="1"/>
           <p:nvPr/>
         </p:nvSpPr>
@@ -21473,7 +21473,7 @@
       <p:grpSpPr/>
       <p:sp>
         <p:nvSpPr>
-          <p:cNvPr id="2" name="Oval 1"/>
+          <p:cNvPr id="2" name="deckgen:decor"/>
           <p:cNvSpPr/>
           <p:nvPr/>
         </p:nvSpPr>
@@ -21503,7 +21503,7 @@
       </p:sp>
       <p:sp>
         <p:nvSpPr>
-          <p:cNvPr id="3" name="Oval 2"/>
+          <p:cNvPr id="3" name="deckgen:decor"/>
           <p:cNvSpPr/>
           <p:nvPr/>
         </p:nvSpPr>
@@ -21533,7 +21533,7 @@
       </p:sp>
       <p:sp>
         <p:nvSpPr>
-          <p:cNvPr id="4" name="Oval 3"/>
+          <p:cNvPr id="4" name="deckgen:decor"/>
           <p:cNvSpPr/>
           <p:nvPr/>
         </p:nvSpPr>
@@ -22603,7 +22603,7 @@
       <p:grpSpPr/>
       <p:sp>
         <p:nvSpPr>
-          <p:cNvPr id="2" name="Oval 1"/>
+          <p:cNvPr id="2" name="deckgen:decor"/>
           <p:cNvSpPr/>
           <p:nvPr/>
         </p:nvSpPr>
@@ -22633,7 +22633,7 @@
       </p:sp>
       <p:sp>
         <p:nvSpPr>
-          <p:cNvPr id="3" name="Oval 2"/>
+          <p:cNvPr id="3" name="deckgen:decor"/>
           <p:cNvSpPr/>
           <p:nvPr/>
         </p:nvSpPr>
@@ -22663,7 +22663,7 @@
       </p:sp>
       <p:sp>
         <p:nvSpPr>
-          <p:cNvPr id="4" name="Oval 3"/>
+          <p:cNvPr id="4" name="deckgen:decor"/>
           <p:cNvSpPr/>
           <p:nvPr/>
         </p:nvSpPr>
@@ -22869,7 +22869,7 @@
       </p:sp>
       <p:sp>
         <p:nvSpPr>
-          <p:cNvPr id="10" name="TextBox 9"/>
+          <p:cNvPr id="10" name="deckgen:ornament"/>
           <p:cNvSpPr txBox="1"/>
           <p:nvPr/>
         </p:nvSpPr>
@@ -23054,7 +23054,7 @@
       </p:sp>
       <p:sp>
         <p:nvSpPr>
-          <p:cNvPr id="14" name="TextBox 13"/>
+          <p:cNvPr id="14" name="deckgen:ornament"/>
           <p:cNvSpPr txBox="1"/>
           <p:nvPr/>
         </p:nvSpPr>
@@ -23239,7 +23239,7 @@
       </p:sp>
       <p:sp>
         <p:nvSpPr>
-          <p:cNvPr id="18" name="TextBox 17"/>
+          <p:cNvPr id="18" name="deckgen:ornament"/>
           <p:cNvSpPr txBox="1"/>
           <p:nvPr/>
         </p:nvSpPr>
@@ -23561,7 +23561,7 @@
       <p:grpSpPr/>
       <p:sp>
         <p:nvSpPr>
-          <p:cNvPr id="2" name="Oval 1"/>
+          <p:cNvPr id="2" name="deckgen:decor"/>
           <p:cNvSpPr/>
           <p:nvPr/>
         </p:nvSpPr>
@@ -23591,7 +23591,7 @@
       </p:sp>
       <p:sp>
         <p:nvSpPr>
-          <p:cNvPr id="3" name="Oval 2"/>
+          <p:cNvPr id="3" name="deckgen:decor"/>
           <p:cNvSpPr/>
           <p:nvPr/>
         </p:nvSpPr>
@@ -23621,7 +23621,7 @@
       </p:sp>
       <p:sp>
         <p:nvSpPr>
-          <p:cNvPr id="4" name="Oval 3"/>
+          <p:cNvPr id="4" name="deckgen:decor"/>
           <p:cNvSpPr/>
           <p:nvPr/>
         </p:nvSpPr>
@@ -23971,7 +23971,7 @@
       </p:sp>
       <p:sp>
         <p:nvSpPr>
-          <p:cNvPr id="14" name="TextBox 13"/>
+          <p:cNvPr id="14" name="deckgen:ornament"/>
           <p:cNvSpPr txBox="1"/>
           <p:nvPr/>
         </p:nvSpPr>
@@ -24295,7 +24295,7 @@
       <p:grpSpPr/>
       <p:sp>
         <p:nvSpPr>
-          <p:cNvPr id="2" name="Oval 1"/>
+          <p:cNvPr id="2" name="deckgen:decor"/>
           <p:cNvSpPr/>
           <p:nvPr/>
         </p:nvSpPr>
@@ -24325,7 +24325,7 @@
       </p:sp>
       <p:sp>
         <p:nvSpPr>
-          <p:cNvPr id="3" name="Oval 2"/>
+          <p:cNvPr id="3" name="deckgen:decor"/>
           <p:cNvSpPr/>
           <p:nvPr/>
         </p:nvSpPr>
@@ -24355,7 +24355,7 @@
       </p:sp>
       <p:sp>
         <p:nvSpPr>
-          <p:cNvPr id="4" name="Oval 3"/>
+          <p:cNvPr id="4" name="deckgen:decor"/>
           <p:cNvSpPr/>
           <p:nvPr/>
         </p:nvSpPr>
@@ -25425,7 +25425,7 @@
       <p:grpSpPr/>
       <p:sp>
         <p:nvSpPr>
-          <p:cNvPr id="2" name="Oval 1"/>
+          <p:cNvPr id="2" name="deckgen:decor"/>
           <p:cNvSpPr/>
           <p:nvPr/>
         </p:nvSpPr>
@@ -25455,7 +25455,7 @@
       </p:sp>
       <p:sp>
         <p:nvSpPr>
-          <p:cNvPr id="3" name="Oval 2"/>
+          <p:cNvPr id="3" name="deckgen:decor"/>
           <p:cNvSpPr/>
           <p:nvPr/>
         </p:nvSpPr>
@@ -25485,7 +25485,7 @@
       </p:sp>
       <p:sp>
         <p:nvSpPr>
-          <p:cNvPr id="4" name="Oval 3"/>
+          <p:cNvPr id="4" name="deckgen:decor"/>
           <p:cNvSpPr/>
           <p:nvPr/>
         </p:nvSpPr>
@@ -25835,7 +25835,7 @@
       </p:sp>
       <p:sp>
         <p:nvSpPr>
-          <p:cNvPr id="14" name="TextBox 13"/>
+          <p:cNvPr id="14" name="deckgen:ornament"/>
           <p:cNvSpPr txBox="1"/>
           <p:nvPr/>
         </p:nvSpPr>
@@ -26159,7 +26159,7 @@
       <p:grpSpPr/>
       <p:sp>
         <p:nvSpPr>
-          <p:cNvPr id="2" name="Oval 1"/>
+          <p:cNvPr id="2" name="deckgen:decor"/>
           <p:cNvSpPr/>
           <p:nvPr/>
         </p:nvSpPr>
@@ -26189,7 +26189,7 @@
       </p:sp>
       <p:sp>
         <p:nvSpPr>
-          <p:cNvPr id="3" name="Oval 2"/>
+          <p:cNvPr id="3" name="deckgen:decor"/>
           <p:cNvSpPr/>
           <p:nvPr/>
         </p:nvSpPr>
@@ -26219,7 +26219,7 @@
       </p:sp>
       <p:sp>
         <p:nvSpPr>
-          <p:cNvPr id="4" name="Oval 3"/>
+          <p:cNvPr id="4" name="deckgen:decor"/>
           <p:cNvSpPr/>
           <p:nvPr/>
         </p:nvSpPr>
@@ -27289,7 +27289,7 @@
       <p:grpSpPr/>
       <p:sp>
         <p:nvSpPr>
-          <p:cNvPr id="2" name="Oval 1"/>
+          <p:cNvPr id="2" name="deckgen:decor"/>
           <p:cNvSpPr/>
           <p:nvPr/>
         </p:nvSpPr>
@@ -27319,7 +27319,7 @@
       </p:sp>
       <p:sp>
         <p:nvSpPr>
-          <p:cNvPr id="3" name="Oval 2"/>
+          <p:cNvPr id="3" name="deckgen:decor"/>
           <p:cNvSpPr/>
           <p:nvPr/>
         </p:nvSpPr>
@@ -27632,7 +27632,7 @@
       <p:grpSpPr/>
       <p:sp>
         <p:nvSpPr>
-          <p:cNvPr id="2" name="Oval 1"/>
+          <p:cNvPr id="2" name="deckgen:decor"/>
           <p:cNvSpPr/>
           <p:nvPr/>
         </p:nvSpPr>
@@ -27662,7 +27662,7 @@
       </p:sp>
       <p:sp>
         <p:nvSpPr>
-          <p:cNvPr id="3" name="Oval 2"/>
+          <p:cNvPr id="3" name="deckgen:decor"/>
           <p:cNvSpPr/>
           <p:nvPr/>
         </p:nvSpPr>
@@ -27692,7 +27692,7 @@
       </p:sp>
       <p:sp>
         <p:nvSpPr>
-          <p:cNvPr id="4" name="Oval 3"/>
+          <p:cNvPr id="4" name="deckgen:decor"/>
           <p:cNvSpPr/>
           <p:nvPr/>
         </p:nvSpPr>
@@ -27898,7 +27898,7 @@
       </p:sp>
       <p:sp>
         <p:nvSpPr>
-          <p:cNvPr id="10" name="TextBox 9"/>
+          <p:cNvPr id="10" name="deckgen:ornament"/>
           <p:cNvSpPr txBox="1"/>
           <p:nvPr/>
         </p:nvSpPr>
@@ -28083,7 +28083,7 @@
       </p:sp>
       <p:sp>
         <p:nvSpPr>
-          <p:cNvPr id="14" name="TextBox 13"/>
+          <p:cNvPr id="14" name="deckgen:ornament"/>
           <p:cNvSpPr txBox="1"/>
           <p:nvPr/>
         </p:nvSpPr>
@@ -28268,7 +28268,7 @@
       </p:sp>
       <p:sp>
         <p:nvSpPr>
-          <p:cNvPr id="18" name="TextBox 17"/>
+          <p:cNvPr id="18" name="deckgen:ornament"/>
           <p:cNvSpPr txBox="1"/>
           <p:nvPr/>
         </p:nvSpPr>
@@ -28519,7 +28519,7 @@
       <p:grpSpPr/>
       <p:sp>
         <p:nvSpPr>
-          <p:cNvPr id="2" name="Oval 1"/>
+          <p:cNvPr id="2" name="deckgen:decor"/>
           <p:cNvSpPr/>
           <p:nvPr/>
         </p:nvSpPr>
@@ -28549,7 +28549,7 @@
       </p:sp>
       <p:sp>
         <p:nvSpPr>
-          <p:cNvPr id="3" name="Oval 2"/>
+          <p:cNvPr id="3" name="deckgen:decor"/>
           <p:cNvSpPr/>
           <p:nvPr/>
         </p:nvSpPr>
@@ -28579,7 +28579,7 @@
       </p:sp>
       <p:sp>
         <p:nvSpPr>
-          <p:cNvPr id="4" name="Oval 3"/>
+          <p:cNvPr id="4" name="deckgen:decor"/>
           <p:cNvSpPr/>
           <p:nvPr/>
         </p:nvSpPr>
@@ -29510,7 +29510,7 @@
       <p:grpSpPr/>
       <p:sp>
         <p:nvSpPr>
-          <p:cNvPr id="2" name="Oval 1"/>
+          <p:cNvPr id="2" name="deckgen:decor"/>
           <p:cNvSpPr/>
           <p:nvPr/>
         </p:nvSpPr>
@@ -29540,7 +29540,7 @@
       </p:sp>
       <p:sp>
         <p:nvSpPr>
-          <p:cNvPr id="3" name="Oval 2"/>
+          <p:cNvPr id="3" name="deckgen:decor"/>
           <p:cNvSpPr/>
           <p:nvPr/>
         </p:nvSpPr>
@@ -29570,7 +29570,7 @@
       </p:sp>
       <p:sp>
         <p:nvSpPr>
-          <p:cNvPr id="4" name="Oval 3"/>
+          <p:cNvPr id="4" name="deckgen:decor"/>
           <p:cNvSpPr/>
           <p:nvPr/>
         </p:nvSpPr>
@@ -30734,7 +30734,7 @@
       <p:grpSpPr/>
       <p:sp>
         <p:nvSpPr>
-          <p:cNvPr id="2" name="Oval 1"/>
+          <p:cNvPr id="2" name="deckgen:decor"/>
           <p:cNvSpPr/>
           <p:nvPr/>
         </p:nvSpPr>
@@ -30764,7 +30764,7 @@
       </p:sp>
       <p:sp>
         <p:nvSpPr>
-          <p:cNvPr id="3" name="Oval 2"/>
+          <p:cNvPr id="3" name="deckgen:decor"/>
           <p:cNvSpPr/>
           <p:nvPr/>
         </p:nvSpPr>
@@ -31280,7 +31280,7 @@
               </a:lnSpc>
             </a:pPr>
             <a:r>
-              <a:rPr sz="2475" b="1">
+              <a:rPr sz="2250" b="1">
                 <a:solidFill>
                   <a:srgbClr val="14110E"/>
                 </a:solidFill>
@@ -31288,130 +31288,14 @@
                 <a:ea typeface="Pretendard"/>
                 <a:cs typeface="Pretendard"/>
               </a:rPr>
-              <a:t>받은 결과를 한 번 대조하기</a:t>
-            </a:r>
-          </a:p>
-        </p:txBody>
-      </p:sp>
-      <p:sp>
-        <p:nvSpPr>
-          <p:cNvPr id="17" name="Rounded Rectangle 16"/>
-          <p:cNvSpPr/>
-          <p:nvPr/>
-        </p:nvSpPr>
-        <p:spPr>
-          <a:xfrm>
-            <a:off x="9372600" y="6286500"/>
-            <a:ext cx="7772400" cy="819150"/>
-          </a:xfrm>
-          <a:prstGeom prst="roundRect">
-            <a:avLst>
-              <a:gd name="adj" fmla="val 6976"/>
-            </a:avLst>
-          </a:prstGeom>
-          <a:solidFill>
-            <a:srgbClr val="FBFAF8"/>
-          </a:solidFill>
-          <a:ln w="9525">
-            <a:solidFill>
-              <a:srgbClr val="E8E4DF"/>
-            </a:solidFill>
-          </a:ln>
-          <a:effectLst/>
-        </p:spPr>
-        <p:txBody>
-          <a:bodyPr rtlCol="0" anchor="ctr" wrap="square"/>
-          <a:lstStyle/>
-          <a:p>
-            <a:pPr algn="ctr"/>
-          </a:p>
-        </p:txBody>
-      </p:sp>
-      <p:sp>
-        <p:nvSpPr>
-          <p:cNvPr id="18" name="TextBox 17"/>
-          <p:cNvSpPr txBox="1"/>
-          <p:nvPr/>
-        </p:nvSpPr>
-        <p:spPr>
-          <a:xfrm>
-            <a:off x="9658350" y="6515100"/>
-            <a:ext cx="419100" cy="381000"/>
-          </a:xfrm>
-          <a:prstGeom prst="rect">
-            <a:avLst/>
-          </a:prstGeom>
-          <a:noFill/>
-        </p:spPr>
-        <p:txBody>
-          <a:bodyPr wrap="square" lIns="0" rIns="0" tIns="0" bIns="0" anchor="t">
-            <a:spAutoFit/>
-          </a:bodyPr>
-          <a:lstStyle/>
-          <a:p>
-            <a:pPr algn="l">
-              <a:lnSpc>
-                <a:spcPct val="100000"/>
-              </a:lnSpc>
-            </a:pPr>
-            <a:r>
-              <a:rPr sz="2475" b="1">
-                <a:solidFill>
-                  <a:srgbClr val="A84E00"/>
-                </a:solidFill>
-                <a:latin typeface="Pretendard"/>
-                <a:ea typeface="Pretendard"/>
-                <a:cs typeface="Pretendard"/>
-              </a:rPr>
-              <a:t>✓</a:t>
-            </a:r>
-          </a:p>
-        </p:txBody>
-      </p:sp>
-      <p:sp>
-        <p:nvSpPr>
-          <p:cNvPr id="19" name="TextBox 18"/>
-          <p:cNvSpPr txBox="1"/>
-          <p:nvPr/>
-        </p:nvSpPr>
-        <p:spPr>
-          <a:xfrm>
-            <a:off x="10134600" y="6515100"/>
-            <a:ext cx="6724650" cy="381000"/>
-          </a:xfrm>
-          <a:prstGeom prst="rect">
-            <a:avLst/>
-          </a:prstGeom>
-          <a:noFill/>
-        </p:spPr>
-        <p:txBody>
-          <a:bodyPr wrap="square" lIns="0" rIns="0" tIns="0" bIns="0" anchor="t">
-            <a:spAutoFit/>
-          </a:bodyPr>
-          <a:lstStyle/>
-          <a:p>
-            <a:pPr algn="l">
-              <a:lnSpc>
-                <a:spcPct val="100000"/>
-              </a:lnSpc>
-            </a:pPr>
-            <a:r>
-              <a:rPr sz="2475" b="1">
-                <a:solidFill>
-                  <a:srgbClr val="14110E"/>
-                </a:solidFill>
-                <a:latin typeface="Pretendard"/>
-                <a:ea typeface="Pretendard"/>
-                <a:cs typeface="Pretendard"/>
-              </a:rPr>
-              <a:t>「모르면 모른다고 말해줘」 붙이기</a:t>
-            </a:r>
-          </a:p>
-        </p:txBody>
-      </p:sp>
-      <p:sp>
-        <p:nvSpPr>
-          <p:cNvPr id="20" name="Rectangle 19"/>
+              <a:t>받은 결과를 한 번 대조하고 「모르면 모른다고 말해줘」 붙이기</a:t>
+            </a:r>
+          </a:p>
+        </p:txBody>
+      </p:sp>
+      <p:sp>
+        <p:nvSpPr>
+          <p:cNvPr id="17" name="Rectangle 16"/>
           <p:cNvSpPr/>
           <p:nvPr/>
         </p:nvSpPr>
@@ -31441,7 +31325,7 @@
       </p:sp>
       <p:sp>
         <p:nvSpPr>
-          <p:cNvPr id="21" name="TextBox 20"/>
+          <p:cNvPr id="18" name="TextBox 17"/>
           <p:cNvSpPr txBox="1"/>
           <p:nvPr/>
         </p:nvSpPr>
@@ -31482,7 +31366,7 @@
       </p:sp>
       <p:sp>
         <p:nvSpPr>
-          <p:cNvPr id="22" name="TextBox 21"/>
+          <p:cNvPr id="19" name="TextBox 18"/>
           <p:cNvSpPr txBox="1"/>
           <p:nvPr/>
         </p:nvSpPr>
@@ -31541,7 +31425,7 @@
       <p:grpSpPr/>
       <p:sp>
         <p:nvSpPr>
-          <p:cNvPr id="2" name="Oval 1"/>
+          <p:cNvPr id="2" name="deckgen:decor"/>
           <p:cNvSpPr/>
           <p:nvPr/>
         </p:nvSpPr>
@@ -31571,7 +31455,7 @@
       </p:sp>
       <p:sp>
         <p:nvSpPr>
-          <p:cNvPr id="3" name="Oval 2"/>
+          <p:cNvPr id="3" name="deckgen:decor"/>
           <p:cNvSpPr/>
           <p:nvPr/>
         </p:nvSpPr>
@@ -31601,7 +31485,7 @@
       </p:sp>
       <p:sp>
         <p:nvSpPr>
-          <p:cNvPr id="4" name="Oval 3"/>
+          <p:cNvPr id="4" name="deckgen:decor"/>
           <p:cNvSpPr/>
           <p:nvPr/>
         </p:nvSpPr>
@@ -33477,7 +33361,7 @@
       <p:grpSpPr/>
       <p:sp>
         <p:nvSpPr>
-          <p:cNvPr id="2" name="Oval 1"/>
+          <p:cNvPr id="2" name="deckgen:decor"/>
           <p:cNvSpPr/>
           <p:nvPr/>
         </p:nvSpPr>
@@ -33507,7 +33391,7 @@
       </p:sp>
       <p:sp>
         <p:nvSpPr>
-          <p:cNvPr id="3" name="Oval 2"/>
+          <p:cNvPr id="3" name="deckgen:decor"/>
           <p:cNvSpPr/>
           <p:nvPr/>
         </p:nvSpPr>
@@ -33537,7 +33421,7 @@
       </p:sp>
       <p:sp>
         <p:nvSpPr>
-          <p:cNvPr id="4" name="Oval 3"/>
+          <p:cNvPr id="4" name="deckgen:decor"/>
           <p:cNvSpPr/>
           <p:nvPr/>
         </p:nvSpPr>
@@ -34742,7 +34626,7 @@
       <p:grpSpPr/>
       <p:sp>
         <p:nvSpPr>
-          <p:cNvPr id="2" name="Oval 1"/>
+          <p:cNvPr id="2" name="deckgen:decor"/>
           <p:cNvSpPr/>
           <p:nvPr/>
         </p:nvSpPr>
@@ -34772,7 +34656,7 @@
       </p:sp>
       <p:sp>
         <p:nvSpPr>
-          <p:cNvPr id="3" name="Oval 2"/>
+          <p:cNvPr id="3" name="deckgen:decor"/>
           <p:cNvSpPr/>
           <p:nvPr/>
         </p:nvSpPr>
@@ -35085,7 +34969,7 @@
       <p:grpSpPr/>
       <p:sp>
         <p:nvSpPr>
-          <p:cNvPr id="2" name="Oval 1"/>
+          <p:cNvPr id="2" name="deckgen:decor"/>
           <p:cNvSpPr/>
           <p:nvPr/>
         </p:nvSpPr>
@@ -35115,7 +34999,7 @@
       </p:sp>
       <p:sp>
         <p:nvSpPr>
-          <p:cNvPr id="3" name="Oval 2"/>
+          <p:cNvPr id="3" name="deckgen:decor"/>
           <p:cNvSpPr/>
           <p:nvPr/>
         </p:nvSpPr>
@@ -35145,7 +35029,7 @@
       </p:sp>
       <p:sp>
         <p:nvSpPr>
-          <p:cNvPr id="4" name="Oval 3"/>
+          <p:cNvPr id="4" name="deckgen:decor"/>
           <p:cNvSpPr/>
           <p:nvPr/>
         </p:nvSpPr>
@@ -36398,7 +36282,7 @@
       <p:grpSpPr/>
       <p:sp>
         <p:nvSpPr>
-          <p:cNvPr id="2" name="Oval 1"/>
+          <p:cNvPr id="2" name="deckgen:decor"/>
           <p:cNvSpPr/>
           <p:nvPr/>
         </p:nvSpPr>
@@ -36428,7 +36312,7 @@
       </p:sp>
       <p:sp>
         <p:nvSpPr>
-          <p:cNvPr id="3" name="Oval 2"/>
+          <p:cNvPr id="3" name="deckgen:decor"/>
           <p:cNvSpPr/>
           <p:nvPr/>
         </p:nvSpPr>
@@ -36458,7 +36342,7 @@
       </p:sp>
       <p:sp>
         <p:nvSpPr>
-          <p:cNvPr id="4" name="Oval 3"/>
+          <p:cNvPr id="4" name="deckgen:decor"/>
           <p:cNvSpPr/>
           <p:nvPr/>
         </p:nvSpPr>
@@ -37459,7 +37343,7 @@
       <p:grpSpPr/>
       <p:sp>
         <p:nvSpPr>
-          <p:cNvPr id="2" name="Oval 1"/>
+          <p:cNvPr id="2" name="deckgen:decor"/>
           <p:cNvSpPr/>
           <p:nvPr/>
         </p:nvSpPr>
@@ -37489,7 +37373,7 @@
       </p:sp>
       <p:sp>
         <p:nvSpPr>
-          <p:cNvPr id="3" name="Oval 2"/>
+          <p:cNvPr id="3" name="deckgen:decor"/>
           <p:cNvSpPr/>
           <p:nvPr/>
         </p:nvSpPr>
@@ -37519,7 +37403,7 @@
       </p:sp>
       <p:sp>
         <p:nvSpPr>
-          <p:cNvPr id="4" name="Oval 3"/>
+          <p:cNvPr id="4" name="deckgen:decor"/>
           <p:cNvSpPr/>
           <p:nvPr/>
         </p:nvSpPr>
